--- a/Computing presentation.pptx
+++ b/Computing presentation.pptx
@@ -113,6 +113,11 @@
       </a:defRPr>
     </a:lvl9pPr>
   </p:defaultTextStyle>
+  <p:extLst>
+    <p:ext uri="{EFAFB233-063F-42B5-8137-9DF3F51BA10A}">
+      <p15:sldGuideLst xmlns:p15="http://schemas.microsoft.com/office/powerpoint/2012/main"/>
+    </p:ext>
+  </p:extLst>
 </p:presentation>
 </file>
 
@@ -265,7 +270,7 @@
           <a:p>
             <a:fld id="{572F3BC8-B76F-4FF9-8BEE-F89EC7AFE1BE}" type="datetimeFigureOut">
               <a:rPr lang="en-UG" smtClean="0"/>
-              <a:t>26/05/2026</a:t>
+              <a:t>05/26/2026</a:t>
             </a:fld>
             <a:endParaRPr lang="en-UG"/>
           </a:p>
@@ -465,7 +470,7 @@
           <a:p>
             <a:fld id="{572F3BC8-B76F-4FF9-8BEE-F89EC7AFE1BE}" type="datetimeFigureOut">
               <a:rPr lang="en-UG" smtClean="0"/>
-              <a:t>26/05/2026</a:t>
+              <a:t>05/26/2026</a:t>
             </a:fld>
             <a:endParaRPr lang="en-UG"/>
           </a:p>
@@ -675,7 +680,7 @@
           <a:p>
             <a:fld id="{572F3BC8-B76F-4FF9-8BEE-F89EC7AFE1BE}" type="datetimeFigureOut">
               <a:rPr lang="en-UG" smtClean="0"/>
-              <a:t>26/05/2026</a:t>
+              <a:t>05/26/2026</a:t>
             </a:fld>
             <a:endParaRPr lang="en-UG"/>
           </a:p>
@@ -875,7 +880,7 @@
           <a:p>
             <a:fld id="{572F3BC8-B76F-4FF9-8BEE-F89EC7AFE1BE}" type="datetimeFigureOut">
               <a:rPr lang="en-UG" smtClean="0"/>
-              <a:t>26/05/2026</a:t>
+              <a:t>05/26/2026</a:t>
             </a:fld>
             <a:endParaRPr lang="en-UG"/>
           </a:p>
@@ -1151,7 +1156,7 @@
           <a:p>
             <a:fld id="{572F3BC8-B76F-4FF9-8BEE-F89EC7AFE1BE}" type="datetimeFigureOut">
               <a:rPr lang="en-UG" smtClean="0"/>
-              <a:t>26/05/2026</a:t>
+              <a:t>05/26/2026</a:t>
             </a:fld>
             <a:endParaRPr lang="en-UG"/>
           </a:p>
@@ -1419,7 +1424,7 @@
           <a:p>
             <a:fld id="{572F3BC8-B76F-4FF9-8BEE-F89EC7AFE1BE}" type="datetimeFigureOut">
               <a:rPr lang="en-UG" smtClean="0"/>
-              <a:t>26/05/2026</a:t>
+              <a:t>05/26/2026</a:t>
             </a:fld>
             <a:endParaRPr lang="en-UG"/>
           </a:p>
@@ -1834,7 +1839,7 @@
           <a:p>
             <a:fld id="{572F3BC8-B76F-4FF9-8BEE-F89EC7AFE1BE}" type="datetimeFigureOut">
               <a:rPr lang="en-UG" smtClean="0"/>
-              <a:t>26/05/2026</a:t>
+              <a:t>05/26/2026</a:t>
             </a:fld>
             <a:endParaRPr lang="en-UG"/>
           </a:p>
@@ -1976,7 +1981,7 @@
           <a:p>
             <a:fld id="{572F3BC8-B76F-4FF9-8BEE-F89EC7AFE1BE}" type="datetimeFigureOut">
               <a:rPr lang="en-UG" smtClean="0"/>
-              <a:t>26/05/2026</a:t>
+              <a:t>05/26/2026</a:t>
             </a:fld>
             <a:endParaRPr lang="en-UG"/>
           </a:p>
@@ -2089,7 +2094,7 @@
           <a:p>
             <a:fld id="{572F3BC8-B76F-4FF9-8BEE-F89EC7AFE1BE}" type="datetimeFigureOut">
               <a:rPr lang="en-UG" smtClean="0"/>
-              <a:t>26/05/2026</a:t>
+              <a:t>05/26/2026</a:t>
             </a:fld>
             <a:endParaRPr lang="en-UG"/>
           </a:p>
@@ -2402,7 +2407,7 @@
           <a:p>
             <a:fld id="{572F3BC8-B76F-4FF9-8BEE-F89EC7AFE1BE}" type="datetimeFigureOut">
               <a:rPr lang="en-UG" smtClean="0"/>
-              <a:t>26/05/2026</a:t>
+              <a:t>05/26/2026</a:t>
             </a:fld>
             <a:endParaRPr lang="en-UG"/>
           </a:p>
@@ -2691,7 +2696,7 @@
           <a:p>
             <a:fld id="{572F3BC8-B76F-4FF9-8BEE-F89EC7AFE1BE}" type="datetimeFigureOut">
               <a:rPr lang="en-UG" smtClean="0"/>
-              <a:t>26/05/2026</a:t>
+              <a:t>05/26/2026</a:t>
             </a:fld>
             <a:endParaRPr lang="en-UG"/>
           </a:p>
@@ -2934,7 +2939,7 @@
           <a:p>
             <a:fld id="{572F3BC8-B76F-4FF9-8BEE-F89EC7AFE1BE}" type="datetimeFigureOut">
               <a:rPr lang="en-UG" smtClean="0"/>
-              <a:t>26/05/2026</a:t>
+              <a:t>05/26/2026</a:t>
             </a:fld>
             <a:endParaRPr lang="en-UG"/>
           </a:p>
@@ -3433,7 +3438,7 @@
           <p:nvPr>
             <p:extLst>
               <p:ext uri="{D42A27DB-BD31-4B8C-83A1-F6EECF244321}">
-                <p14:modId xmlns:p14="http://schemas.microsoft.com/office/powerpoint/2010/main" val="1773337724"/>
+                <p14:modId xmlns:p14="http://schemas.microsoft.com/office/powerpoint/2010/main" val="672203241"/>
               </p:ext>
             </p:extLst>
           </p:nvPr>
@@ -3696,7 +3701,11 @@
                     <a:p>
                       <a:r>
                         <a:rPr lang="en-US" dirty="0"/>
-                        <a:t>25/U/BIO/04517/PE</a:t>
+                        <a:t>25/U/BIO/04517</a:t>
+                      </a:r>
+                      <a:r>
+                        <a:rPr lang="en-US"/>
+                        <a:t>/PD</a:t>
                       </a:r>
                       <a:endParaRPr lang="en-UG" dirty="0"/>
                     </a:p>
